--- a/data/deep_dives/carteira_fidc_gonn_fidc_99_44b59fb4/exports/documentary_comparison.pptx
+++ b/data/deep_dives/carteira_fidc_gonn_fidc_99_44b59fb4/exports/documentary_comparison.pptx
@@ -4281,7 +4281,7 @@
                       <a:r>
                         <a:rPr sz="1300" b="1">
                           <a:solidFill>
-                            <a:srgbClr val="1F1F1F"/>
+                            <a:srgbClr val="FFFFFF"/>
                           </a:solidFill>
                           <a:latin typeface="Calibri"/>
                         </a:rPr>
@@ -4291,7 +4291,7 @@
                   </a:txBody>
                   <a:tcPr marL="91440" marR="91440" marT="41148" marB="41148" anchor="ctr">
                     <a:solidFill>
-                      <a:srgbClr val="EC7000"/>
+                      <a:srgbClr val="FF6200"/>
                     </a:solidFill>
                     <a:lnL>
                       <a:noFill/>
@@ -4330,7 +4330,7 @@
                       <a:r>
                         <a:rPr sz="1300" b="1">
                           <a:solidFill>
-                            <a:srgbClr val="1F1F1F"/>
+                            <a:srgbClr val="FFFFFF"/>
                           </a:solidFill>
                           <a:latin typeface="Calibri"/>
                         </a:rPr>
@@ -4340,7 +4340,7 @@
                   </a:txBody>
                   <a:tcPr marL="91440" marR="91440" marT="41148" marB="41148" anchor="ctr">
                     <a:solidFill>
-                      <a:srgbClr val="EC7000"/>
+                      <a:srgbClr val="FF6200"/>
                     </a:solidFill>
                     <a:lnL>
                       <a:noFill/>
@@ -5184,7 +5184,7 @@
                       <a:r>
                         <a:rPr sz="1300" b="1">
                           <a:solidFill>
-                            <a:srgbClr val="1F1F1F"/>
+                            <a:srgbClr val="FFFFFF"/>
                           </a:solidFill>
                           <a:latin typeface="Calibri"/>
                         </a:rPr>
@@ -5194,7 +5194,7 @@
                   </a:txBody>
                   <a:tcPr marL="91440" marR="91440" marT="41148" marB="41148" anchor="ctr">
                     <a:solidFill>
-                      <a:srgbClr val="EC7000"/>
+                      <a:srgbClr val="FF6200"/>
                     </a:solidFill>
                     <a:lnL>
                       <a:noFill/>
@@ -5233,7 +5233,7 @@
                       <a:r>
                         <a:rPr sz="1300" b="1">
                           <a:solidFill>
-                            <a:srgbClr val="1F1F1F"/>
+                            <a:srgbClr val="FFFFFF"/>
                           </a:solidFill>
                           <a:latin typeface="Calibri"/>
                         </a:rPr>
@@ -5243,7 +5243,7 @@
                   </a:txBody>
                   <a:tcPr marL="91440" marR="91440" marT="41148" marB="41148" anchor="ctr">
                     <a:solidFill>
-                      <a:srgbClr val="EC7000"/>
+                      <a:srgbClr val="FF6200"/>
                     </a:solidFill>
                     <a:lnL>
                       <a:noFill/>
@@ -5991,7 +5991,7 @@
                       <a:r>
                         <a:rPr sz="1300" b="1">
                           <a:solidFill>
-                            <a:srgbClr val="1F1F1F"/>
+                            <a:srgbClr val="FFFFFF"/>
                           </a:solidFill>
                           <a:latin typeface="Calibri"/>
                         </a:rPr>
@@ -6001,7 +6001,7 @@
                   </a:txBody>
                   <a:tcPr marL="91440" marR="91440" marT="41148" marB="41148" anchor="ctr">
                     <a:solidFill>
-                      <a:srgbClr val="EC7000"/>
+                      <a:srgbClr val="FF6200"/>
                     </a:solidFill>
                     <a:lnL>
                       <a:noFill/>
@@ -6040,7 +6040,7 @@
                       <a:r>
                         <a:rPr sz="1300" b="1">
                           <a:solidFill>
-                            <a:srgbClr val="1F1F1F"/>
+                            <a:srgbClr val="FFFFFF"/>
                           </a:solidFill>
                           <a:latin typeface="Calibri"/>
                         </a:rPr>
@@ -6050,7 +6050,7 @@
                   </a:txBody>
                   <a:tcPr marL="91440" marR="91440" marT="41148" marB="41148" anchor="ctr">
                     <a:solidFill>
-                      <a:srgbClr val="EC7000"/>
+                      <a:srgbClr val="FF6200"/>
                     </a:solidFill>
                     <a:lnL>
                       <a:noFill/>
@@ -6838,7 +6838,7 @@
         </p:nvGraphicFramePr>
         <p:xfrm>
           <a:off x="438912" y="932688"/>
-          <a:ext cx="11313871" cy="1714500"/>
+          <a:ext cx="11313871" cy="1527048"/>
         </p:xfrm>
         <a:graphic>
           <a:graphicData uri="http://schemas.openxmlformats.org/drawingml/2006/table">
@@ -6872,7 +6872,7 @@
                       <a:r>
                         <a:rPr sz="1300" b="1">
                           <a:solidFill>
-                            <a:srgbClr val="1F1F1F"/>
+                            <a:srgbClr val="FFFFFF"/>
                           </a:solidFill>
                           <a:latin typeface="Calibri"/>
                         </a:rPr>
@@ -6882,7 +6882,7 @@
                   </a:txBody>
                   <a:tcPr marL="91440" marR="91440" marT="41148" marB="41148" anchor="ctr">
                     <a:solidFill>
-                      <a:srgbClr val="EC7000"/>
+                      <a:srgbClr val="FF6200"/>
                     </a:solidFill>
                     <a:lnL>
                       <a:noFill/>
@@ -6921,7 +6921,7 @@
                       <a:r>
                         <a:rPr sz="1300" b="1">
                           <a:solidFill>
-                            <a:srgbClr val="1F1F1F"/>
+                            <a:srgbClr val="FFFFFF"/>
                           </a:solidFill>
                           <a:latin typeface="Calibri"/>
                         </a:rPr>
@@ -6931,7 +6931,7 @@
                   </a:txBody>
                   <a:tcPr marL="91440" marR="91440" marT="41148" marB="41148" anchor="ctr">
                     <a:solidFill>
-                      <a:srgbClr val="EC7000"/>
+                      <a:srgbClr val="FF6200"/>
                     </a:solidFill>
                     <a:lnL>
                       <a:noFill/>
@@ -7046,7 +7046,7 @@
                   </a:tcPr>
                 </a:tc>
               </a:tr>
-              <a:tr h="470916">
+              <a:tr h="283464">
                 <a:tc>
                   <a:txBody>
                     <a:bodyPr wrap="square">
@@ -7119,29 +7119,7 @@
                           </a:solidFill>
                           <a:latin typeface="Calibri"/>
                         </a:rPr>
-                        <a:t>Benchmark/spread regular não localizado; adicional não utilização 0,75% a.a. sobre parcela não</a:t>
-                      </a:r>
-                    </a:p>
-                    <a:p>
-                      <a:pPr algn="ctr">
-                        <a:lnSpc>
-                          <a:spcPct val="100000"/>
-                        </a:lnSpc>
-                        <a:spcBef>
-                          <a:spcPts val="0"/>
-                        </a:spcBef>
-                        <a:spcAft>
-                          <a:spcPts val="0"/>
-                        </a:spcAft>
-                      </a:pPr>
-                      <a:r>
-                        <a:rPr sz="1300" b="0">
-                          <a:solidFill>
-                            <a:srgbClr val="1F1F1F"/>
-                          </a:solidFill>
-                          <a:latin typeface="Calibri"/>
-                        </a:rPr>
-                        <a:t>utilizada</a:t>
+                        <a:t>adicional não utilização 0,75% a.a. sobre parcela não utilizada</a:t>
                       </a:r>
                     </a:p>
                   </a:txBody>
@@ -7237,7 +7215,7 @@
                           </a:solidFill>
                           <a:latin typeface="Calibri"/>
                         </a:rPr>
-                        <a:t>2ª emissão:1 cota sênior deR$ 150 mi; consolidação aprovada, volume final consolidado não localizado</a:t>
+                        <a:t>2ª emissão:1 cota sênior deR$ 150 mi; consolidação aprovada</a:t>
                       </a:r>
                     </a:p>
                   </a:txBody>
@@ -7539,7 +7517,7 @@
                       <a:r>
                         <a:rPr sz="1300" b="1">
                           <a:solidFill>
-                            <a:srgbClr val="1F1F1F"/>
+                            <a:srgbClr val="FFFFFF"/>
                           </a:solidFill>
                           <a:latin typeface="Calibri"/>
                         </a:rPr>
@@ -7549,7 +7527,7 @@
                   </a:txBody>
                   <a:tcPr marL="91440" marR="91440" marT="41148" marB="41148" anchor="ctr">
                     <a:solidFill>
-                      <a:srgbClr val="EC7000"/>
+                      <a:srgbClr val="FF6200"/>
                     </a:solidFill>
                     <a:lnL>
                       <a:noFill/>
@@ -7588,7 +7566,7 @@
                       <a:r>
                         <a:rPr sz="1300" b="1">
                           <a:solidFill>
-                            <a:srgbClr val="1F1F1F"/>
+                            <a:srgbClr val="FFFFFF"/>
                           </a:solidFill>
                           <a:latin typeface="Calibri"/>
                         </a:rPr>
@@ -7598,7 +7576,7 @@
                   </a:txBody>
                   <a:tcPr marL="91440" marR="91440" marT="41148" marB="41148" anchor="ctr">
                     <a:solidFill>
-                      <a:srgbClr val="EC7000"/>
+                      <a:srgbClr val="FF6200"/>
                     </a:solidFill>
                     <a:lnL>
                       <a:noFill/>
@@ -7690,7 +7668,7 @@
                           </a:solidFill>
                           <a:latin typeface="Calibri"/>
                         </a:rPr>
-                        <a:t>Carência/cronograma regular não localizados na parte acessível dos apêndices</a:t>
+                        <a:t>-</a:t>
                       </a:r>
                     </a:p>
                   </a:txBody>
@@ -7906,7 +7884,7 @@
                           </a:solidFill>
                           <a:latin typeface="Calibri"/>
                         </a:rPr>
-                        <a:t>Prazo/data final remetidos ao apêndice; cronograma fechado não identificado</a:t>
+                        <a:t>-</a:t>
                       </a:r>
                     </a:p>
                   </a:txBody>
@@ -8110,7 +8088,7 @@
                       <a:r>
                         <a:rPr sz="1300" b="1">
                           <a:solidFill>
-                            <a:srgbClr val="1F1F1F"/>
+                            <a:srgbClr val="FFFFFF"/>
                           </a:solidFill>
                           <a:latin typeface="Calibri"/>
                         </a:rPr>
@@ -8120,7 +8098,7 @@
                   </a:txBody>
                   <a:tcPr marL="91440" marR="91440" marT="41148" marB="41148" anchor="ctr">
                     <a:solidFill>
-                      <a:srgbClr val="EC7000"/>
+                      <a:srgbClr val="FF6200"/>
                     </a:solidFill>
                     <a:lnL>
                       <a:noFill/>
@@ -8159,7 +8137,7 @@
                       <a:r>
                         <a:rPr sz="1300" b="1">
                           <a:solidFill>
-                            <a:srgbClr val="1F1F1F"/>
+                            <a:srgbClr val="FFFFFF"/>
                           </a:solidFill>
                           <a:latin typeface="Calibri"/>
                         </a:rPr>
@@ -8169,7 +8147,7 @@
                   </a:txBody>
                   <a:tcPr marL="91440" marR="91440" marT="41148" marB="41148" anchor="ctr">
                     <a:solidFill>
-                      <a:srgbClr val="EC7000"/>
+                      <a:srgbClr val="FF6200"/>
                     </a:solidFill>
                     <a:lnL>
                       <a:noFill/>
@@ -8659,7 +8637,7 @@
                       <a:r>
                         <a:rPr sz="1300" b="1">
                           <a:solidFill>
-                            <a:srgbClr val="1F1F1F"/>
+                            <a:srgbClr val="FFFFFF"/>
                           </a:solidFill>
                           <a:latin typeface="Calibri"/>
                         </a:rPr>
@@ -8669,7 +8647,7 @@
                   </a:txBody>
                   <a:tcPr marL="91440" marR="91440" marT="41148" marB="41148" anchor="ctr">
                     <a:solidFill>
-                      <a:srgbClr val="EC7000"/>
+                      <a:srgbClr val="FF6200"/>
                     </a:solidFill>
                     <a:lnL>
                       <a:noFill/>
@@ -8708,7 +8686,7 @@
                       <a:r>
                         <a:rPr sz="1300" b="1">
                           <a:solidFill>
-                            <a:srgbClr val="1F1F1F"/>
+                            <a:srgbClr val="FFFFFF"/>
                           </a:solidFill>
                           <a:latin typeface="Calibri"/>
                         </a:rPr>
@@ -8718,7 +8696,7 @@
                   </a:txBody>
                   <a:tcPr marL="91440" marR="91440" marT="41148" marB="41148" anchor="ctr">
                     <a:solidFill>
-                      <a:srgbClr val="EC7000"/>
+                      <a:srgbClr val="FF6200"/>
                     </a:solidFill>
                     <a:lnL>
                       <a:noFill/>
@@ -8832,29 +8810,7 @@
                           </a:solidFill>
                           <a:latin typeface="Calibri"/>
                         </a:rPr>
-                        <a:t>Direitos creditórios / PL e cotas subordinadas / PL; validar ativo elegível, subclasses e fórmula</a:t>
-                      </a:r>
-                    </a:p>
-                    <a:p>
-                      <a:pPr algn="ctr">
-                        <a:lnSpc>
-                          <a:spcPct val="100000"/>
-                        </a:lnSpc>
-                        <a:spcBef>
-                          <a:spcPts val="0"/>
-                        </a:spcBef>
-                        <a:spcAft>
-                          <a:spcPts val="0"/>
-                        </a:spcAft>
-                      </a:pPr>
-                      <a:r>
-                        <a:rPr sz="1300" b="0">
-                          <a:solidFill>
-                            <a:srgbClr val="1F1F1F"/>
-                          </a:solidFill>
-                          <a:latin typeface="Calibri"/>
-                        </a:rPr>
-                        <a:t>contratual</a:t>
+                        <a:t>Direitos creditórios / PL e cotas subordinadas / PL</a:t>
                       </a:r>
                     </a:p>
                   </a:txBody>
@@ -9188,7 +9144,7 @@
                           </a:solidFill>
                           <a:latin typeface="Calibri"/>
                         </a:rPr>
-                        <a:t>Sem competência IME carregada em cache local</a:t>
+                        <a:t>-</a:t>
                       </a:r>
                     </a:p>
                   </a:txBody>
